--- a/templates/carousels/posts/2026-10-09-fri-checklist.pptx
+++ b/templates/carousels/posts/2026-10-09-fri-checklist.pptx
@@ -4045,7 +4045,7 @@
           <a:p>
             <a:pPr algn="ctr"/>
             <a:r>
-              <a:rPr sz="2400" b="1" i="0">
+              <a:rPr sz="3000" b="1" i="0">
                 <a:solidFill>
                   <a:srgbClr val="22371F"/>
                 </a:solidFill>
@@ -4119,13 +4119,13 @@
           <a:p>
             <a:pPr algn="l"/>
             <a:r>
-              <a:rPr sz="2850" b="0" i="1">
+              <a:rPr sz="5700" b="0" i="1">
                 <a:solidFill>
                   <a:srgbClr val="DBE6A7"/>
                 </a:solidFill>
                 <a:latin typeface="EB Garamond"/>
               </a:rPr>
-              <a:t>[COPY: Allison] One line: who this is for, and the season.</a:t>
+              <a:t>[COPY: Allison] Who this is for, and when.</a:t>
             </a:r>
           </a:p>
         </p:txBody>
@@ -4154,7 +4154,7 @@
           <a:p>
             <a:pPr algn="l"/>
             <a:r>
-              <a:rPr sz="2100" b="1" i="0">
+              <a:rPr sz="3000" b="1" i="0">
                 <a:solidFill>
                   <a:srgbClr val="A7B097"/>
                 </a:solidFill>
@@ -4562,13 +4562,13 @@
               </a:lnSpc>
             </a:pPr>
             <a:r>
-              <a:rPr sz="3600" b="1" i="0">
+              <a:rPr sz="5700" b="1" i="0">
                 <a:solidFill>
                   <a:srgbClr val="22371F"/>
                 </a:solidFill>
                 <a:latin typeface="Montserrat"/>
               </a:rPr>
-              <a:t>[COPY: Allison] Item 1: one line, an action the reader can do today.</a:t>
+              <a:t>[COPY: Allison] Item 1: one action.</a:t>
             </a:r>
           </a:p>
         </p:txBody>
@@ -4582,7 +4582,7 @@
         <p:spPr>
           <a:xfrm>
             <a:off x="4953000" y="8382000"/>
-            <a:ext cx="1143000" cy="1143000"/>
+            <a:ext cx="1428750" cy="1428750"/>
           </a:xfrm>
           <a:prstGeom prst="ellipse">
             <a:avLst/>
@@ -4628,7 +4628,7 @@
         <p:spPr>
           <a:xfrm>
             <a:off x="4953000" y="8382000"/>
-            <a:ext cx="1143000" cy="1143000"/>
+            <a:ext cx="1428750" cy="1428750"/>
           </a:xfrm>
           <a:prstGeom prst="rect">
             <a:avLst/>
@@ -4643,13 +4643,13 @@
           <a:p>
             <a:pPr algn="ctr"/>
             <a:r>
-              <a:rPr sz="1650" b="1" i="0">
+              <a:rPr sz="3000" b="1" i="0">
                 <a:solidFill>
                   <a:srgbClr val="156826"/>
                 </a:solidFill>
                 <a:latin typeface="Montserrat"/>
               </a:rPr>
-              <a:t>[ICON]</a:t>
+              <a:t>ICON</a:t>
             </a:r>
           </a:p>
         </p:txBody>
@@ -4678,7 +4678,7 @@
           <a:p>
             <a:pPr algn="l"/>
             <a:r>
-              <a:rPr sz="2100" b="1" i="0">
+              <a:rPr sz="3000" b="1" i="0">
                 <a:solidFill>
                   <a:srgbClr val="156826"/>
                 </a:solidFill>
@@ -4713,7 +4713,7 @@
           <a:p>
             <a:pPr algn="l"/>
             <a:r>
-              <a:rPr sz="2100" b="1" i="0">
+              <a:rPr sz="3000" b="1" i="0">
                 <a:solidFill>
                   <a:srgbClr val="6A665C"/>
                 </a:solidFill>
@@ -5121,13 +5121,13 @@
               </a:lnSpc>
             </a:pPr>
             <a:r>
-              <a:rPr sz="3600" b="1" i="0">
+              <a:rPr sz="5700" b="1" i="0">
                 <a:solidFill>
                   <a:srgbClr val="22371F"/>
                 </a:solidFill>
                 <a:latin typeface="Montserrat"/>
               </a:rPr>
-              <a:t>[COPY: Allison] Item 2: one line, an action the reader can do today.</a:t>
+              <a:t>[COPY: Allison] Item 2: one action.</a:t>
             </a:r>
           </a:p>
         </p:txBody>
@@ -5141,7 +5141,7 @@
         <p:spPr>
           <a:xfrm>
             <a:off x="4953000" y="8382000"/>
-            <a:ext cx="1143000" cy="1143000"/>
+            <a:ext cx="1428750" cy="1428750"/>
           </a:xfrm>
           <a:prstGeom prst="ellipse">
             <a:avLst/>
@@ -5187,7 +5187,7 @@
         <p:spPr>
           <a:xfrm>
             <a:off x="4953000" y="8382000"/>
-            <a:ext cx="1143000" cy="1143000"/>
+            <a:ext cx="1428750" cy="1428750"/>
           </a:xfrm>
           <a:prstGeom prst="rect">
             <a:avLst/>
@@ -5202,13 +5202,13 @@
           <a:p>
             <a:pPr algn="ctr"/>
             <a:r>
-              <a:rPr sz="1650" b="1" i="0">
+              <a:rPr sz="3000" b="1" i="0">
                 <a:solidFill>
                   <a:srgbClr val="156826"/>
                 </a:solidFill>
                 <a:latin typeface="Montserrat"/>
               </a:rPr>
-              <a:t>[ICON]</a:t>
+              <a:t>ICON</a:t>
             </a:r>
           </a:p>
         </p:txBody>
@@ -5237,7 +5237,7 @@
           <a:p>
             <a:pPr algn="l"/>
             <a:r>
-              <a:rPr sz="2100" b="1" i="0">
+              <a:rPr sz="3000" b="1" i="0">
                 <a:solidFill>
                   <a:srgbClr val="156826"/>
                 </a:solidFill>
@@ -5272,7 +5272,7 @@
           <a:p>
             <a:pPr algn="l"/>
             <a:r>
-              <a:rPr sz="2100" b="1" i="0">
+              <a:rPr sz="3000" b="1" i="0">
                 <a:solidFill>
                   <a:srgbClr val="6A665C"/>
                 </a:solidFill>
@@ -5680,13 +5680,13 @@
               </a:lnSpc>
             </a:pPr>
             <a:r>
-              <a:rPr sz="3600" b="1" i="0">
+              <a:rPr sz="5700" b="1" i="0">
                 <a:solidFill>
                   <a:srgbClr val="22371F"/>
                 </a:solidFill>
                 <a:latin typeface="Montserrat"/>
               </a:rPr>
-              <a:t>[COPY: Allison] Item 3: one line, an action the reader can do today.</a:t>
+              <a:t>[COPY: Allison] Item 3: one action.</a:t>
             </a:r>
           </a:p>
         </p:txBody>
@@ -5700,7 +5700,7 @@
         <p:spPr>
           <a:xfrm>
             <a:off x="4953000" y="8382000"/>
-            <a:ext cx="1143000" cy="1143000"/>
+            <a:ext cx="1428750" cy="1428750"/>
           </a:xfrm>
           <a:prstGeom prst="ellipse">
             <a:avLst/>
@@ -5746,7 +5746,7 @@
         <p:spPr>
           <a:xfrm>
             <a:off x="4953000" y="8382000"/>
-            <a:ext cx="1143000" cy="1143000"/>
+            <a:ext cx="1428750" cy="1428750"/>
           </a:xfrm>
           <a:prstGeom prst="rect">
             <a:avLst/>
@@ -5761,13 +5761,13 @@
           <a:p>
             <a:pPr algn="ctr"/>
             <a:r>
-              <a:rPr sz="1650" b="1" i="0">
+              <a:rPr sz="3000" b="1" i="0">
                 <a:solidFill>
                   <a:srgbClr val="156826"/>
                 </a:solidFill>
                 <a:latin typeface="Montserrat"/>
               </a:rPr>
-              <a:t>[ICON]</a:t>
+              <a:t>ICON</a:t>
             </a:r>
           </a:p>
         </p:txBody>
@@ -5796,7 +5796,7 @@
           <a:p>
             <a:pPr algn="l"/>
             <a:r>
-              <a:rPr sz="2100" b="1" i="0">
+              <a:rPr sz="3000" b="1" i="0">
                 <a:solidFill>
                   <a:srgbClr val="156826"/>
                 </a:solidFill>
@@ -5831,7 +5831,7 @@
           <a:p>
             <a:pPr algn="l"/>
             <a:r>
-              <a:rPr sz="2100" b="1" i="0">
+              <a:rPr sz="3000" b="1" i="0">
                 <a:solidFill>
                   <a:srgbClr val="6A665C"/>
                 </a:solidFill>
@@ -6239,13 +6239,13 @@
               </a:lnSpc>
             </a:pPr>
             <a:r>
-              <a:rPr sz="3600" b="1" i="0">
+              <a:rPr sz="5700" b="1" i="0">
                 <a:solidFill>
                   <a:srgbClr val="22371F"/>
                 </a:solidFill>
                 <a:latin typeface="Montserrat"/>
               </a:rPr>
-              <a:t>[COPY: Allison] Item 4: one line, an action the reader can do today.</a:t>
+              <a:t>[COPY: Allison] Item 4: one action.</a:t>
             </a:r>
           </a:p>
         </p:txBody>
@@ -6259,7 +6259,7 @@
         <p:spPr>
           <a:xfrm>
             <a:off x="4953000" y="8382000"/>
-            <a:ext cx="1143000" cy="1143000"/>
+            <a:ext cx="1428750" cy="1428750"/>
           </a:xfrm>
           <a:prstGeom prst="ellipse">
             <a:avLst/>
@@ -6305,7 +6305,7 @@
         <p:spPr>
           <a:xfrm>
             <a:off x="4953000" y="8382000"/>
-            <a:ext cx="1143000" cy="1143000"/>
+            <a:ext cx="1428750" cy="1428750"/>
           </a:xfrm>
           <a:prstGeom prst="rect">
             <a:avLst/>
@@ -6320,13 +6320,13 @@
           <a:p>
             <a:pPr algn="ctr"/>
             <a:r>
-              <a:rPr sz="1650" b="1" i="0">
+              <a:rPr sz="3000" b="1" i="0">
                 <a:solidFill>
                   <a:srgbClr val="156826"/>
                 </a:solidFill>
                 <a:latin typeface="Montserrat"/>
               </a:rPr>
-              <a:t>[ICON]</a:t>
+              <a:t>ICON</a:t>
             </a:r>
           </a:p>
         </p:txBody>
@@ -6355,7 +6355,7 @@
           <a:p>
             <a:pPr algn="l"/>
             <a:r>
-              <a:rPr sz="2100" b="1" i="0">
+              <a:rPr sz="3000" b="1" i="0">
                 <a:solidFill>
                   <a:srgbClr val="156826"/>
                 </a:solidFill>
@@ -6390,7 +6390,7 @@
           <a:p>
             <a:pPr algn="l"/>
             <a:r>
-              <a:rPr sz="2100" b="1" i="0">
+              <a:rPr sz="3000" b="1" i="0">
                 <a:solidFill>
                   <a:srgbClr val="6A665C"/>
                 </a:solidFill>
@@ -6798,13 +6798,13 @@
               </a:lnSpc>
             </a:pPr>
             <a:r>
-              <a:rPr sz="3600" b="1" i="0">
+              <a:rPr sz="5700" b="1" i="0">
                 <a:solidFill>
                   <a:srgbClr val="22371F"/>
                 </a:solidFill>
                 <a:latin typeface="Montserrat"/>
               </a:rPr>
-              <a:t>[COPY: Allison] Item 5: one line, an action the reader can do today.</a:t>
+              <a:t>[COPY: Allison] Item 5: one action.</a:t>
             </a:r>
           </a:p>
         </p:txBody>
@@ -6818,7 +6818,7 @@
         <p:spPr>
           <a:xfrm>
             <a:off x="4953000" y="8382000"/>
-            <a:ext cx="1143000" cy="1143000"/>
+            <a:ext cx="1428750" cy="1428750"/>
           </a:xfrm>
           <a:prstGeom prst="ellipse">
             <a:avLst/>
@@ -6864,7 +6864,7 @@
         <p:spPr>
           <a:xfrm>
             <a:off x="4953000" y="8382000"/>
-            <a:ext cx="1143000" cy="1143000"/>
+            <a:ext cx="1428750" cy="1428750"/>
           </a:xfrm>
           <a:prstGeom prst="rect">
             <a:avLst/>
@@ -6879,13 +6879,13 @@
           <a:p>
             <a:pPr algn="ctr"/>
             <a:r>
-              <a:rPr sz="1650" b="1" i="0">
+              <a:rPr sz="3000" b="1" i="0">
                 <a:solidFill>
                   <a:srgbClr val="156826"/>
                 </a:solidFill>
                 <a:latin typeface="Montserrat"/>
               </a:rPr>
-              <a:t>[ICON]</a:t>
+              <a:t>ICON</a:t>
             </a:r>
           </a:p>
         </p:txBody>
@@ -6914,7 +6914,7 @@
           <a:p>
             <a:pPr algn="l"/>
             <a:r>
-              <a:rPr sz="2100" b="1" i="0">
+              <a:rPr sz="3000" b="1" i="0">
                 <a:solidFill>
                   <a:srgbClr val="156826"/>
                 </a:solidFill>
@@ -6949,7 +6949,7 @@
           <a:p>
             <a:pPr algn="l"/>
             <a:r>
-              <a:rPr sz="2100" b="1" i="0">
+              <a:rPr sz="3000" b="1" i="0">
                 <a:solidFill>
                   <a:srgbClr val="6A665C"/>
                 </a:solidFill>
@@ -7303,7 +7303,7 @@
         <p:spPr>
           <a:xfrm>
             <a:off x="571500" y="571500"/>
-            <a:ext cx="8572500" cy="381000"/>
+            <a:ext cx="9144000" cy="381000"/>
           </a:xfrm>
           <a:prstGeom prst="rect">
             <a:avLst/>
@@ -7318,7 +7318,7 @@
           <a:p>
             <a:pPr algn="l"/>
             <a:r>
-              <a:rPr sz="2100" b="1" i="0">
+              <a:rPr sz="3000" b="1" i="0">
                 <a:solidFill>
                   <a:srgbClr val="156826"/>
                 </a:solidFill>
@@ -7357,7 +7357,7 @@
               </a:lnSpc>
             </a:pPr>
             <a:r>
-              <a:rPr sz="4050" b="1" i="0">
+              <a:rPr sz="3600" b="1" i="0">
                 <a:solidFill>
                   <a:srgbClr val="22371F"/>
                 </a:solidFill>
@@ -7480,7 +7480,7 @@
           <a:p>
             <a:pPr algn="ctr"/>
             <a:r>
-              <a:rPr sz="2700" b="1" i="0">
+              <a:rPr sz="3000" b="1" i="0">
                 <a:solidFill>
                   <a:srgbClr val="DBE6A7"/>
                 </a:solidFill>
@@ -7515,13 +7515,13 @@
           <a:p>
             <a:pPr algn="l"/>
             <a:r>
-              <a:rPr sz="2850" b="1" i="0">
+              <a:rPr sz="3300" b="1" i="0">
                 <a:solidFill>
                   <a:srgbClr val="22371F"/>
                 </a:solidFill>
                 <a:latin typeface="Montserrat"/>
               </a:rPr>
-              <a:t>[COPY: Allison] Item 1, short form.</a:t>
+              <a:t>[COPY: Allison] Item 1</a:t>
             </a:r>
           </a:p>
         </p:txBody>
@@ -7638,7 +7638,7 @@
           <a:p>
             <a:pPr algn="ctr"/>
             <a:r>
-              <a:rPr sz="2700" b="1" i="0">
+              <a:rPr sz="3000" b="1" i="0">
                 <a:solidFill>
                   <a:srgbClr val="DBE6A7"/>
                 </a:solidFill>
@@ -7673,13 +7673,13 @@
           <a:p>
             <a:pPr algn="l"/>
             <a:r>
-              <a:rPr sz="2850" b="1" i="0">
+              <a:rPr sz="3300" b="1" i="0">
                 <a:solidFill>
                   <a:srgbClr val="22371F"/>
                 </a:solidFill>
                 <a:latin typeface="Montserrat"/>
               </a:rPr>
-              <a:t>[COPY: Allison] Item 2, short form.</a:t>
+              <a:t>[COPY: Allison] Item 2</a:t>
             </a:r>
           </a:p>
         </p:txBody>
@@ -7796,7 +7796,7 @@
           <a:p>
             <a:pPr algn="ctr"/>
             <a:r>
-              <a:rPr sz="2700" b="1" i="0">
+              <a:rPr sz="3000" b="1" i="0">
                 <a:solidFill>
                   <a:srgbClr val="DBE6A7"/>
                 </a:solidFill>
@@ -7831,13 +7831,13 @@
           <a:p>
             <a:pPr algn="l"/>
             <a:r>
-              <a:rPr sz="2850" b="1" i="0">
+              <a:rPr sz="3300" b="1" i="0">
                 <a:solidFill>
                   <a:srgbClr val="22371F"/>
                 </a:solidFill>
                 <a:latin typeface="Montserrat"/>
               </a:rPr>
-              <a:t>[COPY: Allison] Item 3, short form.</a:t>
+              <a:t>[COPY: Allison] Item 3</a:t>
             </a:r>
           </a:p>
         </p:txBody>
@@ -7954,7 +7954,7 @@
           <a:p>
             <a:pPr algn="ctr"/>
             <a:r>
-              <a:rPr sz="2700" b="1" i="0">
+              <a:rPr sz="3000" b="1" i="0">
                 <a:solidFill>
                   <a:srgbClr val="DBE6A7"/>
                 </a:solidFill>
@@ -7989,13 +7989,13 @@
           <a:p>
             <a:pPr algn="l"/>
             <a:r>
-              <a:rPr sz="2850" b="1" i="0">
+              <a:rPr sz="3300" b="1" i="0">
                 <a:solidFill>
                   <a:srgbClr val="22371F"/>
                 </a:solidFill>
                 <a:latin typeface="Montserrat"/>
               </a:rPr>
-              <a:t>[COPY: Allison] Item 4, short form.</a:t>
+              <a:t>[COPY: Allison] Item 4</a:t>
             </a:r>
           </a:p>
         </p:txBody>
@@ -8112,7 +8112,7 @@
           <a:p>
             <a:pPr algn="ctr"/>
             <a:r>
-              <a:rPr sz="2700" b="1" i="0">
+              <a:rPr sz="3000" b="1" i="0">
                 <a:solidFill>
                   <a:srgbClr val="DBE6A7"/>
                 </a:solidFill>
@@ -8147,13 +8147,13 @@
           <a:p>
             <a:pPr algn="l"/>
             <a:r>
-              <a:rPr sz="2850" b="1" i="0">
+              <a:rPr sz="3300" b="1" i="0">
                 <a:solidFill>
                   <a:srgbClr val="22371F"/>
                 </a:solidFill>
                 <a:latin typeface="Montserrat"/>
               </a:rPr>
-              <a:t>[COPY: Allison] Item 5, short form.</a:t>
+              <a:t>[COPY: Allison] Item 5</a:t>
             </a:r>
           </a:p>
         </p:txBody>
@@ -8182,7 +8182,7 @@
           <a:p>
             <a:pPr algn="l"/>
             <a:r>
-              <a:rPr sz="2100" b="1" i="0">
+              <a:rPr sz="3000" b="1" i="0">
                 <a:solidFill>
                   <a:srgbClr val="6A665C"/>
                 </a:solidFill>

--- a/templates/carousels/posts/2026-10-09-fri-checklist.pptx
+++ b/templates/carousels/posts/2026-10-09-fri-checklist.pptx
@@ -4130,9 +4130,33 @@
           </a:p>
         </p:txBody>
       </p:sp>
-      <p:sp>
-        <p:nvSpPr>
-          <p:cNvPr id="6" name="TextBox 5"/>
+      <p:pic>
+        <p:nvPicPr>
+          <p:cNvPr id="6" name="Picture 5" descr="st817168922133752987.png"/>
+          <p:cNvPicPr>
+            <a:picLocks noChangeAspect="1"/>
+          </p:cNvPicPr>
+          <p:nvPr/>
+        </p:nvPicPr>
+        <p:blipFill>
+          <a:blip r:embed="rId3"/>
+          <a:stretch>
+            <a:fillRect/>
+          </a:stretch>
+        </p:blipFill>
+        <p:spPr>
+          <a:xfrm rot="540000">
+            <a:off x="6572250" y="857250"/>
+            <a:ext cx="3848100" cy="2895600"/>
+          </a:xfrm>
+          <a:prstGeom prst="rect">
+            <a:avLst/>
+          </a:prstGeom>
+        </p:spPr>
+      </p:pic>
+      <p:sp>
+        <p:nvSpPr>
+          <p:cNvPr id="7" name="TextBox 6"/>
           <p:cNvSpPr txBox="1"/>
           <p:nvPr/>
         </p:nvSpPr>
@@ -4167,7 +4191,7 @@
       </p:sp>
       <p:sp>
         <p:nvSpPr>
-          <p:cNvPr id="7" name="Oval 6"/>
+          <p:cNvPr id="8" name="Oval 7"/>
           <p:cNvSpPr/>
           <p:nvPr/>
         </p:nvSpPr>
@@ -4211,7 +4235,7 @@
       </p:sp>
       <p:sp>
         <p:nvSpPr>
-          <p:cNvPr id="8" name="Oval 7"/>
+          <p:cNvPr id="9" name="Oval 8"/>
           <p:cNvSpPr/>
           <p:nvPr/>
         </p:nvSpPr>
@@ -4255,7 +4279,7 @@
       </p:sp>
       <p:sp>
         <p:nvSpPr>
-          <p:cNvPr id="9" name="Oval 8"/>
+          <p:cNvPr id="10" name="Oval 9"/>
           <p:cNvSpPr/>
           <p:nvPr/>
         </p:nvSpPr>
@@ -4299,7 +4323,7 @@
       </p:sp>
       <p:sp>
         <p:nvSpPr>
-          <p:cNvPr id="10" name="Oval 9"/>
+          <p:cNvPr id="11" name="Oval 10"/>
           <p:cNvSpPr/>
           <p:nvPr/>
         </p:nvSpPr>
@@ -4343,7 +4367,7 @@
       </p:sp>
       <p:sp>
         <p:nvSpPr>
-          <p:cNvPr id="11" name="Oval 10"/>
+          <p:cNvPr id="12" name="Oval 11"/>
           <p:cNvSpPr/>
           <p:nvPr/>
         </p:nvSpPr>
@@ -4387,7 +4411,7 @@
       </p:sp>
       <p:sp>
         <p:nvSpPr>
-          <p:cNvPr id="12" name="Oval 11"/>
+          <p:cNvPr id="13" name="Oval 12"/>
           <p:cNvSpPr/>
           <p:nvPr/>
         </p:nvSpPr>
@@ -4431,7 +4455,7 @@
       </p:sp>
       <p:sp>
         <p:nvSpPr>
-          <p:cNvPr id="13" name="Oval 12"/>
+          <p:cNvPr id="14" name="Oval 13"/>
           <p:cNvSpPr/>
           <p:nvPr/>
         </p:nvSpPr>
